--- a/ai/src/ppt dataset/Grey Minimalist Professional Project Presentation.pptx
+++ b/ai/src/ppt dataset/Grey Minimalist Professional Project Presentation.pptx
@@ -3145,6 +3145,10 @@
             </a:stretch>
           </a:blipFill>
         </p:spPr>
+        <p:txBody>
+          <a:bodyPr/>
+          <a:p/>
+        </p:txBody>
       </p:sp>
       <p:sp>
         <p:nvSpPr>
@@ -3197,6 +3201,10 @@
             </a:stretch>
           </a:blipFill>
         </p:spPr>
+        <p:txBody>
+          <a:bodyPr/>
+          <a:p/>
+        </p:txBody>
       </p:sp>
       <p:sp>
         <p:nvSpPr>
@@ -3249,6 +3257,10 @@
             </a:stretch>
           </a:blipFill>
         </p:spPr>
+        <p:txBody>
+          <a:bodyPr/>
+          <a:p/>
+        </p:txBody>
       </p:sp>
       <p:sp>
         <p:nvSpPr>
@@ -3301,6 +3313,10 @@
             </a:stretch>
           </a:blipFill>
         </p:spPr>
+        <p:txBody>
+          <a:bodyPr/>
+          <a:p/>
+        </p:txBody>
       </p:sp>
       <p:sp>
         <p:nvSpPr>
@@ -3353,6 +3369,10 @@
             </a:stretch>
           </a:blipFill>
         </p:spPr>
+        <p:txBody>
+          <a:bodyPr/>
+          <a:p/>
+        </p:txBody>
       </p:sp>
       <p:sp>
         <p:nvSpPr>
@@ -3405,6 +3425,10 @@
             </a:stretch>
           </a:blipFill>
         </p:spPr>
+        <p:txBody>
+          <a:bodyPr/>
+          <a:p/>
+        </p:txBody>
       </p:sp>
       <p:sp>
         <p:nvSpPr>
@@ -3426,25 +3450,7 @@
             <a:spAutoFit/>
           </a:bodyPr>
           <a:lstStyle/>
-          <a:p>
-            <a:pPr algn="ctr">
-              <a:lnSpc>
-                <a:spcPts val="16107"/>
-              </a:lnSpc>
-            </a:pPr>
-            <a:r>
-              <a:rPr lang="en-US" b="true" sz="11505">
-                <a:solidFill>
-                  <a:srgbClr val="3F3D3E"/>
-                </a:solidFill>
-                <a:latin typeface="Alexandria Bold"/>
-                <a:ea typeface="Alexandria Bold"/>
-                <a:cs typeface="Alexandria Bold"/>
-                <a:sym typeface="Alexandria Bold"/>
-              </a:rPr>
-              <a:t>PRESENTATION</a:t>
-            </a:r>
-          </a:p>
+          <a:p/>
         </p:txBody>
       </p:sp>
       <p:sp>
@@ -3467,28 +3473,7 @@
             <a:spAutoFit/>
           </a:bodyPr>
           <a:lstStyle/>
-          <a:p>
-            <a:pPr algn="ctr">
-              <a:lnSpc>
-                <a:spcPts val="6256"/>
-              </a:lnSpc>
-              <a:spcBef>
-                <a:spcPct val="0"/>
-              </a:spcBef>
-            </a:pPr>
-            <a:r>
-              <a:rPr lang="en-US" sz="4468">
-                <a:solidFill>
-                  <a:srgbClr val="545454"/>
-                </a:solidFill>
-                <a:latin typeface="Garet"/>
-                <a:ea typeface="Garet"/>
-                <a:cs typeface="Garet"/>
-                <a:sym typeface="Garet"/>
-              </a:rPr>
-              <a:t>By Adeline Palmerston</a:t>
-            </a:r>
-          </a:p>
+          <a:p/>
         </p:txBody>
       </p:sp>
       <p:grpSp>
@@ -3638,28 +3623,7 @@
             <a:spAutoFit/>
           </a:bodyPr>
           <a:lstStyle/>
-          <a:p>
-            <a:pPr algn="ctr">
-              <a:lnSpc>
-                <a:spcPts val="4296"/>
-              </a:lnSpc>
-              <a:spcBef>
-                <a:spcPct val="0"/>
-              </a:spcBef>
-            </a:pPr>
-            <a:r>
-              <a:rPr lang="en-US" sz="3068">
-                <a:solidFill>
-                  <a:srgbClr val="E9E9E9"/>
-                </a:solidFill>
-                <a:latin typeface="Garet"/>
-                <a:ea typeface="Garet"/>
-                <a:cs typeface="Garet"/>
-                <a:sym typeface="Garet"/>
-              </a:rPr>
-              <a:t>reallygreatsite.com</a:t>
-            </a:r>
-          </a:p>
+          <a:p/>
         </p:txBody>
       </p:sp>
     </p:spTree>
@@ -3745,6 +3709,10 @@
             </a:stretch>
           </a:blipFill>
         </p:spPr>
+        <p:txBody>
+          <a:bodyPr/>
+          <a:p/>
+        </p:txBody>
       </p:sp>
       <p:sp>
         <p:nvSpPr>
@@ -3766,25 +3734,7 @@
             <a:spAutoFit/>
           </a:bodyPr>
           <a:lstStyle/>
-          <a:p>
-            <a:pPr algn="ctr">
-              <a:lnSpc>
-                <a:spcPts val="11448"/>
-              </a:lnSpc>
-            </a:pPr>
-            <a:r>
-              <a:rPr lang="en-US" b="true" sz="8177">
-                <a:solidFill>
-                  <a:srgbClr val="3F3D3E"/>
-                </a:solidFill>
-                <a:latin typeface="Alexandria Bold"/>
-                <a:ea typeface="Alexandria Bold"/>
-                <a:cs typeface="Alexandria Bold"/>
-                <a:sym typeface="Alexandria Bold"/>
-              </a:rPr>
-              <a:t>CONCLUSION</a:t>
-            </a:r>
-          </a:p>
+          <a:p/>
         </p:txBody>
       </p:sp>
       <p:sp>
@@ -3807,28 +3757,7 @@
             <a:spAutoFit/>
           </a:bodyPr>
           <a:lstStyle/>
-          <a:p>
-            <a:pPr algn="ctr">
-              <a:lnSpc>
-                <a:spcPts val="4576"/>
-              </a:lnSpc>
-              <a:spcBef>
-                <a:spcPct val="0"/>
-              </a:spcBef>
-            </a:pPr>
-            <a:r>
-              <a:rPr lang="en-US" sz="3268">
-                <a:solidFill>
-                  <a:srgbClr val="545454"/>
-                </a:solidFill>
-                <a:latin typeface="Garet"/>
-                <a:ea typeface="Garet"/>
-                <a:cs typeface="Garet"/>
-                <a:sym typeface="Garet"/>
-              </a:rPr>
-              <a:t>Lorem ipsum dolor sit amet, consectetur adipiscing elit. Duis vel dolor ante. Nullam feugiat egestas elit et vehicula. Proin venenatis, orci nec cursus tristique, nulla risus mattis eros, id accumsan massa elit eu augue. Mauris massa ipsum, pharetra id nibh eget, sodales facilisis enim.</a:t>
-            </a:r>
-          </a:p>
+          <a:p/>
         </p:txBody>
       </p:sp>
       <p:sp>
@@ -3882,6 +3811,10 @@
             </a:stretch>
           </a:blipFill>
         </p:spPr>
+        <p:txBody>
+          <a:bodyPr/>
+          <a:p/>
+        </p:txBody>
       </p:sp>
       <p:sp>
         <p:nvSpPr>
@@ -3906,6 +3839,10 @@
             <a:tailEnd type="none" len="sm" w="sm"/>
           </a:ln>
         </p:spPr>
+        <p:txBody>
+          <a:bodyPr/>
+          <a:p/>
+        </p:txBody>
       </p:sp>
       <p:sp>
         <p:nvSpPr>
@@ -3927,28 +3864,7 @@
             <a:spAutoFit/>
           </a:bodyPr>
           <a:lstStyle/>
-          <a:p>
-            <a:pPr algn="ctr">
-              <a:lnSpc>
-                <a:spcPts val="6641"/>
-              </a:lnSpc>
-              <a:spcBef>
-                <a:spcPct val="0"/>
-              </a:spcBef>
-            </a:pPr>
-            <a:r>
-              <a:rPr lang="en-US" b="true" sz="4743">
-                <a:solidFill>
-                  <a:srgbClr val="545454"/>
-                </a:solidFill>
-                <a:latin typeface="Garet Bold"/>
-                <a:ea typeface="Garet Bold"/>
-                <a:cs typeface="Garet Bold"/>
-                <a:sym typeface="Garet Bold"/>
-              </a:rPr>
-              <a:t>09</a:t>
-            </a:r>
-          </a:p>
+          <a:p/>
         </p:txBody>
       </p:sp>
     </p:spTree>
@@ -4034,6 +3950,10 @@
             </a:stretch>
           </a:blipFill>
         </p:spPr>
+        <p:txBody>
+          <a:bodyPr/>
+          <a:p/>
+        </p:txBody>
       </p:sp>
       <p:sp>
         <p:nvSpPr>
@@ -4055,25 +3975,7 @@
             <a:spAutoFit/>
           </a:bodyPr>
           <a:lstStyle/>
-          <a:p>
-            <a:pPr algn="ctr">
-              <a:lnSpc>
-                <a:spcPts val="16107"/>
-              </a:lnSpc>
-            </a:pPr>
-            <a:r>
-              <a:rPr lang="en-US" b="true" sz="11505">
-                <a:solidFill>
-                  <a:srgbClr val="3F3D3E"/>
-                </a:solidFill>
-                <a:latin typeface="Alexandria Bold"/>
-                <a:ea typeface="Alexandria Bold"/>
-                <a:cs typeface="Alexandria Bold"/>
-                <a:sym typeface="Alexandria Bold"/>
-              </a:rPr>
-              <a:t>THANK YOU</a:t>
-            </a:r>
-          </a:p>
+          <a:p/>
         </p:txBody>
       </p:sp>
       <p:sp>
@@ -4127,6 +4029,10 @@
             </a:stretch>
           </a:blipFill>
         </p:spPr>
+        <p:txBody>
+          <a:bodyPr/>
+          <a:p/>
+        </p:txBody>
       </p:sp>
       <p:sp>
         <p:nvSpPr>
@@ -4151,6 +4057,10 @@
             <a:tailEnd type="none" len="sm" w="sm"/>
           </a:ln>
         </p:spPr>
+        <p:txBody>
+          <a:bodyPr/>
+          <a:p/>
+        </p:txBody>
       </p:sp>
       <p:sp>
         <p:nvSpPr>
@@ -4172,28 +4082,7 @@
             <a:spAutoFit/>
           </a:bodyPr>
           <a:lstStyle/>
-          <a:p>
-            <a:pPr algn="ctr">
-              <a:lnSpc>
-                <a:spcPts val="6641"/>
-              </a:lnSpc>
-              <a:spcBef>
-                <a:spcPct val="0"/>
-              </a:spcBef>
-            </a:pPr>
-            <a:r>
-              <a:rPr lang="en-US" b="true" sz="4743">
-                <a:solidFill>
-                  <a:srgbClr val="545454"/>
-                </a:solidFill>
-                <a:latin typeface="Garet Bold"/>
-                <a:ea typeface="Garet Bold"/>
-                <a:cs typeface="Garet Bold"/>
-                <a:sym typeface="Garet Bold"/>
-              </a:rPr>
-              <a:t>10</a:t>
-            </a:r>
-          </a:p>
+          <a:p/>
         </p:txBody>
       </p:sp>
     </p:spTree>
@@ -4279,6 +4168,10 @@
             </a:stretch>
           </a:blipFill>
         </p:spPr>
+        <p:txBody>
+          <a:bodyPr/>
+          <a:p/>
+        </p:txBody>
       </p:sp>
       <p:sp>
         <p:nvSpPr>
@@ -4300,25 +4193,7 @@
             <a:spAutoFit/>
           </a:bodyPr>
           <a:lstStyle/>
-          <a:p>
-            <a:pPr algn="ctr">
-              <a:lnSpc>
-                <a:spcPts val="11448"/>
-              </a:lnSpc>
-            </a:pPr>
-            <a:r>
-              <a:rPr lang="en-US" b="true" sz="8177">
-                <a:solidFill>
-                  <a:srgbClr val="3F3D3E"/>
-                </a:solidFill>
-                <a:latin typeface="Alexandria Bold"/>
-                <a:ea typeface="Alexandria Bold"/>
-                <a:cs typeface="Alexandria Bold"/>
-                <a:sym typeface="Alexandria Bold"/>
-              </a:rPr>
-              <a:t>BACKGROUND</a:t>
-            </a:r>
-          </a:p>
+          <a:p/>
         </p:txBody>
       </p:sp>
       <p:sp>
@@ -4341,28 +4216,7 @@
             <a:spAutoFit/>
           </a:bodyPr>
           <a:lstStyle/>
-          <a:p>
-            <a:pPr algn="ctr">
-              <a:lnSpc>
-                <a:spcPts val="4576"/>
-              </a:lnSpc>
-              <a:spcBef>
-                <a:spcPct val="0"/>
-              </a:spcBef>
-            </a:pPr>
-            <a:r>
-              <a:rPr lang="en-US" sz="3268">
-                <a:solidFill>
-                  <a:srgbClr val="545454"/>
-                </a:solidFill>
-                <a:latin typeface="Garet"/>
-                <a:ea typeface="Garet"/>
-                <a:cs typeface="Garet"/>
-                <a:sym typeface="Garet"/>
-              </a:rPr>
-              <a:t>Lorem ipsum dolor sit amet, consectetur adipiscing elit. Duis vel dolor ante. Nullam feugiat egestas elit et vehicula. Proin venenatis, orci nec cursus tristique, nulla risus mattis eros, id accumsan massa elit eu augue. Mauris massa ipsum, pharetra id nibh eget, sodales facilisis enim.</a:t>
-            </a:r>
-          </a:p>
+          <a:p/>
         </p:txBody>
       </p:sp>
       <p:sp>
@@ -4416,6 +4270,10 @@
             </a:stretch>
           </a:blipFill>
         </p:spPr>
+        <p:txBody>
+          <a:bodyPr/>
+          <a:p/>
+        </p:txBody>
       </p:sp>
       <p:sp>
         <p:nvSpPr>
@@ -4440,6 +4298,10 @@
             <a:tailEnd type="none" len="sm" w="sm"/>
           </a:ln>
         </p:spPr>
+        <p:txBody>
+          <a:bodyPr/>
+          <a:p/>
+        </p:txBody>
       </p:sp>
       <p:sp>
         <p:nvSpPr>
@@ -4461,28 +4323,7 @@
             <a:spAutoFit/>
           </a:bodyPr>
           <a:lstStyle/>
-          <a:p>
-            <a:pPr algn="ctr">
-              <a:lnSpc>
-                <a:spcPts val="6641"/>
-              </a:lnSpc>
-              <a:spcBef>
-                <a:spcPct val="0"/>
-              </a:spcBef>
-            </a:pPr>
-            <a:r>
-              <a:rPr lang="en-US" b="true" sz="4743">
-                <a:solidFill>
-                  <a:srgbClr val="545454"/>
-                </a:solidFill>
-                <a:latin typeface="Garet Bold"/>
-                <a:ea typeface="Garet Bold"/>
-                <a:cs typeface="Garet Bold"/>
-                <a:sym typeface="Garet Bold"/>
-              </a:rPr>
-              <a:t>01</a:t>
-            </a:r>
-          </a:p>
+          <a:p/>
         </p:txBody>
       </p:sp>
     </p:spTree>
@@ -4568,6 +4409,10 @@
             </a:stretch>
           </a:blipFill>
         </p:spPr>
+        <p:txBody>
+          <a:bodyPr/>
+          <a:p/>
+        </p:txBody>
       </p:sp>
       <p:sp>
         <p:nvSpPr>
@@ -4589,28 +4434,7 @@
             <a:spAutoFit/>
           </a:bodyPr>
           <a:lstStyle/>
-          <a:p>
-            <a:pPr algn="l">
-              <a:lnSpc>
-                <a:spcPts val="4576"/>
-              </a:lnSpc>
-              <a:spcBef>
-                <a:spcPct val="0"/>
-              </a:spcBef>
-            </a:pPr>
-            <a:r>
-              <a:rPr lang="en-US" sz="3268">
-                <a:solidFill>
-                  <a:srgbClr val="545454"/>
-                </a:solidFill>
-                <a:latin typeface="Garet"/>
-                <a:ea typeface="Garet"/>
-                <a:cs typeface="Garet"/>
-                <a:sym typeface="Garet"/>
-              </a:rPr>
-              <a:t>Lorem ipsum dolor sit amet, consectetur adipiscing elit. Duis vel dolor ante. Nullam feugiat egestas elit et vehicula.</a:t>
-            </a:r>
-          </a:p>
+          <a:p/>
         </p:txBody>
       </p:sp>
       <p:sp>
@@ -4633,25 +4457,7 @@
             <a:spAutoFit/>
           </a:bodyPr>
           <a:lstStyle/>
-          <a:p>
-            <a:pPr algn="ctr">
-              <a:lnSpc>
-                <a:spcPts val="11448"/>
-              </a:lnSpc>
-            </a:pPr>
-            <a:r>
-              <a:rPr lang="en-US" b="true" sz="8177">
-                <a:solidFill>
-                  <a:srgbClr val="3F3D3E"/>
-                </a:solidFill>
-                <a:latin typeface="Alexandria Bold"/>
-                <a:ea typeface="Alexandria Bold"/>
-                <a:cs typeface="Alexandria Bold"/>
-                <a:sym typeface="Alexandria Bold"/>
-              </a:rPr>
-              <a:t>PROJECT GOALS</a:t>
-            </a:r>
-          </a:p>
+          <a:p/>
         </p:txBody>
       </p:sp>
       <p:sp>
@@ -4674,25 +4480,7 @@
             <a:spAutoFit/>
           </a:bodyPr>
           <a:lstStyle/>
-          <a:p>
-            <a:pPr algn="ctr">
-              <a:lnSpc>
-                <a:spcPts val="8889"/>
-              </a:lnSpc>
-            </a:pPr>
-            <a:r>
-              <a:rPr lang="en-US" sz="6349">
-                <a:solidFill>
-                  <a:srgbClr val="3F3D3E"/>
-                </a:solidFill>
-                <a:latin typeface="Alexandria"/>
-                <a:ea typeface="Alexandria"/>
-                <a:cs typeface="Alexandria"/>
-                <a:sym typeface="Alexandria"/>
-              </a:rPr>
-              <a:t>1.</a:t>
-            </a:r>
-          </a:p>
+          <a:p/>
         </p:txBody>
       </p:sp>
       <p:sp>
@@ -4715,28 +4503,7 @@
             <a:spAutoFit/>
           </a:bodyPr>
           <a:lstStyle/>
-          <a:p>
-            <a:pPr algn="l">
-              <a:lnSpc>
-                <a:spcPts val="4576"/>
-              </a:lnSpc>
-              <a:spcBef>
-                <a:spcPct val="0"/>
-              </a:spcBef>
-            </a:pPr>
-            <a:r>
-              <a:rPr lang="en-US" sz="3268">
-                <a:solidFill>
-                  <a:srgbClr val="545454"/>
-                </a:solidFill>
-                <a:latin typeface="Garet"/>
-                <a:ea typeface="Garet"/>
-                <a:cs typeface="Garet"/>
-                <a:sym typeface="Garet"/>
-              </a:rPr>
-              <a:t>Lorem ipsum dolor sit amet, consectetur adipiscing elit. Duis vel dolor ante. Nullam feugiat egestas elit et vehicula.</a:t>
-            </a:r>
-          </a:p>
+          <a:p/>
         </p:txBody>
       </p:sp>
       <p:sp>
@@ -4759,25 +4526,7 @@
             <a:spAutoFit/>
           </a:bodyPr>
           <a:lstStyle/>
-          <a:p>
-            <a:pPr algn="ctr">
-              <a:lnSpc>
-                <a:spcPts val="8889"/>
-              </a:lnSpc>
-            </a:pPr>
-            <a:r>
-              <a:rPr lang="en-US" sz="6349">
-                <a:solidFill>
-                  <a:srgbClr val="3F3D3E"/>
-                </a:solidFill>
-                <a:latin typeface="Alexandria"/>
-                <a:ea typeface="Alexandria"/>
-                <a:cs typeface="Alexandria"/>
-                <a:sym typeface="Alexandria"/>
-              </a:rPr>
-              <a:t>2.</a:t>
-            </a:r>
-          </a:p>
+          <a:p/>
         </p:txBody>
       </p:sp>
       <p:sp>
@@ -4831,6 +4580,10 @@
             </a:stretch>
           </a:blipFill>
         </p:spPr>
+        <p:txBody>
+          <a:bodyPr/>
+          <a:p/>
+        </p:txBody>
       </p:sp>
       <p:sp>
         <p:nvSpPr>
@@ -4855,6 +4608,10 @@
             <a:tailEnd type="none" len="sm" w="sm"/>
           </a:ln>
         </p:spPr>
+        <p:txBody>
+          <a:bodyPr/>
+          <a:p/>
+        </p:txBody>
       </p:sp>
       <p:sp>
         <p:nvSpPr>
@@ -4876,28 +4633,7 @@
             <a:spAutoFit/>
           </a:bodyPr>
           <a:lstStyle/>
-          <a:p>
-            <a:pPr algn="ctr">
-              <a:lnSpc>
-                <a:spcPts val="6641"/>
-              </a:lnSpc>
-              <a:spcBef>
-                <a:spcPct val="0"/>
-              </a:spcBef>
-            </a:pPr>
-            <a:r>
-              <a:rPr lang="en-US" b="true" sz="4743">
-                <a:solidFill>
-                  <a:srgbClr val="545454"/>
-                </a:solidFill>
-                <a:latin typeface="Garet Bold"/>
-                <a:ea typeface="Garet Bold"/>
-                <a:cs typeface="Garet Bold"/>
-                <a:sym typeface="Garet Bold"/>
-              </a:rPr>
-              <a:t>02</a:t>
-            </a:r>
-          </a:p>
+          <a:p/>
         </p:txBody>
       </p:sp>
     </p:spTree>
@@ -4983,6 +4719,10 @@
             </a:stretch>
           </a:blipFill>
         </p:spPr>
+        <p:txBody>
+          <a:bodyPr/>
+          <a:p/>
+        </p:txBody>
       </p:sp>
       <p:sp>
         <p:nvSpPr>
@@ -5004,25 +4744,7 @@
             <a:spAutoFit/>
           </a:bodyPr>
           <a:lstStyle/>
-          <a:p>
-            <a:pPr algn="ctr">
-              <a:lnSpc>
-                <a:spcPts val="11448"/>
-              </a:lnSpc>
-            </a:pPr>
-            <a:r>
-              <a:rPr lang="en-US" b="true" sz="8177">
-                <a:solidFill>
-                  <a:srgbClr val="3F3D3E"/>
-                </a:solidFill>
-                <a:latin typeface="Alexandria Bold"/>
-                <a:ea typeface="Alexandria Bold"/>
-                <a:cs typeface="Alexandria Bold"/>
-                <a:sym typeface="Alexandria Bold"/>
-              </a:rPr>
-              <a:t>DISCUSSION</a:t>
-            </a:r>
-          </a:p>
+          <a:p/>
         </p:txBody>
       </p:sp>
       <p:grpSp>
@@ -5103,28 +4825,7 @@
             <a:spAutoFit/>
           </a:bodyPr>
           <a:lstStyle/>
-          <a:p>
-            <a:pPr algn="l">
-              <a:lnSpc>
-                <a:spcPts val="4576"/>
-              </a:lnSpc>
-              <a:spcBef>
-                <a:spcPct val="0"/>
-              </a:spcBef>
-            </a:pPr>
-            <a:r>
-              <a:rPr lang="en-US" sz="3268">
-                <a:solidFill>
-                  <a:srgbClr val="545454"/>
-                </a:solidFill>
-                <a:latin typeface="Garet"/>
-                <a:ea typeface="Garet"/>
-                <a:cs typeface="Garet"/>
-                <a:sym typeface="Garet"/>
-              </a:rPr>
-              <a:t>Lorem ipsum dolor sit amet, consectetur adipiscing elit. Duis vel dolor ante. Nullam feugiat egestas elit et vehicula.</a:t>
-            </a:r>
-          </a:p>
+          <a:p/>
         </p:txBody>
       </p:sp>
       <p:sp>
@@ -5178,6 +4879,10 @@
             </a:stretch>
           </a:blipFill>
         </p:spPr>
+        <p:txBody>
+          <a:bodyPr/>
+          <a:p/>
+        </p:txBody>
       </p:sp>
       <p:sp>
         <p:nvSpPr>
@@ -5202,6 +4907,10 @@
             <a:tailEnd type="none" len="sm" w="sm"/>
           </a:ln>
         </p:spPr>
+        <p:txBody>
+          <a:bodyPr/>
+          <a:p/>
+        </p:txBody>
       </p:sp>
       <p:sp>
         <p:nvSpPr>
@@ -5223,28 +4932,7 @@
             <a:spAutoFit/>
           </a:bodyPr>
           <a:lstStyle/>
-          <a:p>
-            <a:pPr algn="ctr">
-              <a:lnSpc>
-                <a:spcPts val="6641"/>
-              </a:lnSpc>
-              <a:spcBef>
-                <a:spcPct val="0"/>
-              </a:spcBef>
-            </a:pPr>
-            <a:r>
-              <a:rPr lang="en-US" b="true" sz="4743">
-                <a:solidFill>
-                  <a:srgbClr val="545454"/>
-                </a:solidFill>
-                <a:latin typeface="Garet Bold"/>
-                <a:ea typeface="Garet Bold"/>
-                <a:cs typeface="Garet Bold"/>
-                <a:sym typeface="Garet Bold"/>
-              </a:rPr>
-              <a:t>03</a:t>
-            </a:r>
-          </a:p>
+          <a:p/>
         </p:txBody>
       </p:sp>
     </p:spTree>
@@ -5330,6 +5018,10 @@
             </a:stretch>
           </a:blipFill>
         </p:spPr>
+        <p:txBody>
+          <a:bodyPr/>
+          <a:p/>
+        </p:txBody>
       </p:sp>
       <p:sp>
         <p:nvSpPr>
@@ -5351,25 +5043,7 @@
             <a:spAutoFit/>
           </a:bodyPr>
           <a:lstStyle/>
-          <a:p>
-            <a:pPr algn="ctr">
-              <a:lnSpc>
-                <a:spcPts val="11448"/>
-              </a:lnSpc>
-            </a:pPr>
-            <a:r>
-              <a:rPr lang="en-US" b="true" sz="8177">
-                <a:solidFill>
-                  <a:srgbClr val="3F3D3E"/>
-                </a:solidFill>
-                <a:latin typeface="Alexandria Bold"/>
-                <a:ea typeface="Alexandria Bold"/>
-                <a:cs typeface="Alexandria Bold"/>
-                <a:sym typeface="Alexandria Bold"/>
-              </a:rPr>
-              <a:t>SUBJECT 1</a:t>
-            </a:r>
-          </a:p>
+          <a:p/>
         </p:txBody>
       </p:sp>
       <p:sp>
@@ -5392,27 +5066,7 @@
             <a:spAutoFit/>
           </a:bodyPr>
           <a:lstStyle/>
-          <a:p>
-            <a:pPr algn="l" marL="705747" indent="-352873" lvl="1">
-              <a:lnSpc>
-                <a:spcPts val="4576"/>
-              </a:lnSpc>
-              <a:buFont typeface="Arial"/>
-              <a:buChar char="•"/>
-            </a:pPr>
-            <a:r>
-              <a:rPr lang="en-US" sz="3268">
-                <a:solidFill>
-                  <a:srgbClr val="545454"/>
-                </a:solidFill>
-                <a:latin typeface="Garet"/>
-                <a:ea typeface="Garet"/>
-                <a:cs typeface="Garet"/>
-                <a:sym typeface="Garet"/>
-              </a:rPr>
-              <a:t>Lorem ipsum dolor sit amet, consectetur adipiscing elit. Duis vel dolor ante. Nullam feugiat egestas elit et vehicula.</a:t>
-            </a:r>
-          </a:p>
+          <a:p/>
         </p:txBody>
       </p:sp>
       <p:sp>
@@ -5435,27 +5089,7 @@
             <a:spAutoFit/>
           </a:bodyPr>
           <a:lstStyle/>
-          <a:p>
-            <a:pPr algn="l" marL="705747" indent="-352873" lvl="1">
-              <a:lnSpc>
-                <a:spcPts val="4576"/>
-              </a:lnSpc>
-              <a:buFont typeface="Arial"/>
-              <a:buChar char="•"/>
-            </a:pPr>
-            <a:r>
-              <a:rPr lang="en-US" sz="3268">
-                <a:solidFill>
-                  <a:srgbClr val="545454"/>
-                </a:solidFill>
-                <a:latin typeface="Garet"/>
-                <a:ea typeface="Garet"/>
-                <a:cs typeface="Garet"/>
-                <a:sym typeface="Garet"/>
-              </a:rPr>
-              <a:t>Lorem ipsum dolor sit amet, consectetur adipiscing elit. Duis vel dolor ante. Nullam feugiat egestas elit et vehicula.</a:t>
-            </a:r>
-          </a:p>
+          <a:p/>
         </p:txBody>
       </p:sp>
       <p:sp>
@@ -5509,6 +5143,10 @@
             </a:stretch>
           </a:blipFill>
         </p:spPr>
+        <p:txBody>
+          <a:bodyPr/>
+          <a:p/>
+        </p:txBody>
       </p:sp>
       <p:sp>
         <p:nvSpPr>
@@ -5533,6 +5171,10 @@
             <a:tailEnd type="none" len="sm" w="sm"/>
           </a:ln>
         </p:spPr>
+        <p:txBody>
+          <a:bodyPr/>
+          <a:p/>
+        </p:txBody>
       </p:sp>
       <p:sp>
         <p:nvSpPr>
@@ -5554,28 +5196,7 @@
             <a:spAutoFit/>
           </a:bodyPr>
           <a:lstStyle/>
-          <a:p>
-            <a:pPr algn="ctr">
-              <a:lnSpc>
-                <a:spcPts val="6641"/>
-              </a:lnSpc>
-              <a:spcBef>
-                <a:spcPct val="0"/>
-              </a:spcBef>
-            </a:pPr>
-            <a:r>
-              <a:rPr lang="en-US" b="true" sz="4743">
-                <a:solidFill>
-                  <a:srgbClr val="545454"/>
-                </a:solidFill>
-                <a:latin typeface="Garet Bold"/>
-                <a:ea typeface="Garet Bold"/>
-                <a:cs typeface="Garet Bold"/>
-                <a:sym typeface="Garet Bold"/>
-              </a:rPr>
-              <a:t>04</a:t>
-            </a:r>
-          </a:p>
+          <a:p/>
         </p:txBody>
       </p:sp>
     </p:spTree>
@@ -5661,6 +5282,10 @@
             </a:stretch>
           </a:blipFill>
         </p:spPr>
+        <p:txBody>
+          <a:bodyPr/>
+          <a:p/>
+        </p:txBody>
       </p:sp>
       <p:sp>
         <p:nvSpPr>
@@ -5682,25 +5307,7 @@
             <a:spAutoFit/>
           </a:bodyPr>
           <a:lstStyle/>
-          <a:p>
-            <a:pPr algn="ctr">
-              <a:lnSpc>
-                <a:spcPts val="11448"/>
-              </a:lnSpc>
-            </a:pPr>
-            <a:r>
-              <a:rPr lang="en-US" b="true" sz="8177">
-                <a:solidFill>
-                  <a:srgbClr val="3F3D3E"/>
-                </a:solidFill>
-                <a:latin typeface="Alexandria Bold"/>
-                <a:ea typeface="Alexandria Bold"/>
-                <a:cs typeface="Alexandria Bold"/>
-                <a:sym typeface="Alexandria Bold"/>
-              </a:rPr>
-              <a:t>SUBJECT 2</a:t>
-            </a:r>
-          </a:p>
+          <a:p/>
         </p:txBody>
       </p:sp>
       <p:sp>
@@ -5723,51 +5330,9 @@
             <a:spAutoFit/>
           </a:bodyPr>
           <a:lstStyle/>
-          <a:p>
-            <a:pPr algn="l">
-              <a:lnSpc>
-                <a:spcPts val="4576"/>
-              </a:lnSpc>
-            </a:pPr>
-            <a:r>
-              <a:rPr lang="en-US" sz="3268">
-                <a:solidFill>
-                  <a:srgbClr val="545454"/>
-                </a:solidFill>
-                <a:latin typeface="Garet"/>
-                <a:ea typeface="Garet"/>
-                <a:cs typeface="Garet"/>
-                <a:sym typeface="Garet"/>
-              </a:rPr>
-              <a:t>Lorem ipsum dolor sit amet, consectetur adipiscing elit. Duis vel dolor ante. Nullam feugiat egestas elit et vehicula. Proin venenatis, orci nec cursus tristique, nulla risus mattis eros, id accumsan massa elit eu augue.</a:t>
-            </a:r>
-          </a:p>
-        </p:txBody>
-      </p:sp>
-      <p:pic>
-        <p:nvPicPr>
-          <p:cNvPr name="Picture 5" id="5"/>
-          <p:cNvPicPr>
-            <a:picLocks noChangeAspect="true"/>
-          </p:cNvPicPr>
-          <p:nvPr/>
-        </p:nvPicPr>
-        <p:blipFill>
-          <a:blip r:embed="rId4"/>
-          <a:stretch>
-            <a:fillRect/>
-          </a:stretch>
-        </p:blipFill>
-        <p:spPr>
-          <a:xfrm rot="0">
-            <a:off x="10662729" y="3765398"/>
-            <a:ext cx="4780975" cy="4780975"/>
-          </a:xfrm>
-          <a:prstGeom prst="rect">
-            <a:avLst/>
-          </a:prstGeom>
-        </p:spPr>
-      </p:pic>
+          <a:p/>
+        </p:txBody>
+      </p:sp>
       <p:sp>
         <p:nvSpPr>
           <p:cNvPr name="Freeform 6" id="6"/>
@@ -5819,6 +5384,10 @@
             </a:stretch>
           </a:blipFill>
         </p:spPr>
+        <p:txBody>
+          <a:bodyPr/>
+          <a:p/>
+        </p:txBody>
       </p:sp>
       <p:sp>
         <p:nvSpPr>
@@ -5843,6 +5412,10 @@
             <a:tailEnd type="none" len="sm" w="sm"/>
           </a:ln>
         </p:spPr>
+        <p:txBody>
+          <a:bodyPr/>
+          <a:p/>
+        </p:txBody>
       </p:sp>
       <p:sp>
         <p:nvSpPr>
@@ -5864,28 +5437,7 @@
             <a:spAutoFit/>
           </a:bodyPr>
           <a:lstStyle/>
-          <a:p>
-            <a:pPr algn="ctr">
-              <a:lnSpc>
-                <a:spcPts val="6641"/>
-              </a:lnSpc>
-              <a:spcBef>
-                <a:spcPct val="0"/>
-              </a:spcBef>
-            </a:pPr>
-            <a:r>
-              <a:rPr lang="en-US" b="true" sz="4743">
-                <a:solidFill>
-                  <a:srgbClr val="545454"/>
-                </a:solidFill>
-                <a:latin typeface="Garet Bold"/>
-                <a:ea typeface="Garet Bold"/>
-                <a:cs typeface="Garet Bold"/>
-                <a:sym typeface="Garet Bold"/>
-              </a:rPr>
-              <a:t>05</a:t>
-            </a:r>
-          </a:p>
+          <a:p/>
         </p:txBody>
       </p:sp>
     </p:spTree>
@@ -5971,6 +5523,10 @@
             </a:stretch>
           </a:blipFill>
         </p:spPr>
+        <p:txBody>
+          <a:bodyPr/>
+          <a:p/>
+        </p:txBody>
       </p:sp>
       <p:sp>
         <p:nvSpPr>
@@ -5992,25 +5548,7 @@
             <a:spAutoFit/>
           </a:bodyPr>
           <a:lstStyle/>
-          <a:p>
-            <a:pPr algn="ctr">
-              <a:lnSpc>
-                <a:spcPts val="11448"/>
-              </a:lnSpc>
-            </a:pPr>
-            <a:r>
-              <a:rPr lang="en-US" b="true" sz="8177">
-                <a:solidFill>
-                  <a:srgbClr val="3F3D3E"/>
-                </a:solidFill>
-                <a:latin typeface="Alexandria Bold"/>
-                <a:ea typeface="Alexandria Bold"/>
-                <a:cs typeface="Alexandria Bold"/>
-                <a:sym typeface="Alexandria Bold"/>
-              </a:rPr>
-              <a:t>SUBJECT 3</a:t>
-            </a:r>
-          </a:p>
+          <a:p/>
         </p:txBody>
       </p:sp>
       <p:sp>
@@ -6033,51 +5571,9 @@
             <a:spAutoFit/>
           </a:bodyPr>
           <a:lstStyle/>
-          <a:p>
-            <a:pPr algn="l">
-              <a:lnSpc>
-                <a:spcPts val="4576"/>
-              </a:lnSpc>
-            </a:pPr>
-            <a:r>
-              <a:rPr lang="en-US" sz="3268">
-                <a:solidFill>
-                  <a:srgbClr val="545454"/>
-                </a:solidFill>
-                <a:latin typeface="Garet"/>
-                <a:ea typeface="Garet"/>
-                <a:cs typeface="Garet"/>
-                <a:sym typeface="Garet"/>
-              </a:rPr>
-              <a:t>Lorem ipsum dolor sit amet, consectetur adipiscing elit. Duis vel dolor ante. Nullam feugiat egestas elit et vehicula. Proin venenatis, orci nec cursus tristique, nulla risus mattis eros, id accumsan massa elit eu augue.</a:t>
-            </a:r>
-          </a:p>
-        </p:txBody>
-      </p:sp>
-      <p:pic>
-        <p:nvPicPr>
-          <p:cNvPr name="Picture 5" id="5"/>
-          <p:cNvPicPr>
-            <a:picLocks noChangeAspect="true"/>
-          </p:cNvPicPr>
-          <p:nvPr/>
-        </p:nvPicPr>
-        <p:blipFill>
-          <a:blip r:embed="rId4"/>
-          <a:stretch>
-            <a:fillRect/>
-          </a:stretch>
-        </p:blipFill>
-        <p:spPr>
-          <a:xfrm rot="0">
-            <a:off x="10078881" y="3688393"/>
-            <a:ext cx="5705042" cy="4934986"/>
-          </a:xfrm>
-          <a:prstGeom prst="rect">
-            <a:avLst/>
-          </a:prstGeom>
-        </p:spPr>
-      </p:pic>
+          <a:p/>
+        </p:txBody>
+      </p:sp>
       <p:sp>
         <p:nvSpPr>
           <p:cNvPr name="Freeform 6" id="6"/>
@@ -6129,6 +5625,10 @@
             </a:stretch>
           </a:blipFill>
         </p:spPr>
+        <p:txBody>
+          <a:bodyPr/>
+          <a:p/>
+        </p:txBody>
       </p:sp>
       <p:sp>
         <p:nvSpPr>
@@ -6153,6 +5653,10 @@
             <a:tailEnd type="none" len="sm" w="sm"/>
           </a:ln>
         </p:spPr>
+        <p:txBody>
+          <a:bodyPr/>
+          <a:p/>
+        </p:txBody>
       </p:sp>
       <p:sp>
         <p:nvSpPr>
@@ -6174,28 +5678,7 @@
             <a:spAutoFit/>
           </a:bodyPr>
           <a:lstStyle/>
-          <a:p>
-            <a:pPr algn="ctr">
-              <a:lnSpc>
-                <a:spcPts val="6641"/>
-              </a:lnSpc>
-              <a:spcBef>
-                <a:spcPct val="0"/>
-              </a:spcBef>
-            </a:pPr>
-            <a:r>
-              <a:rPr lang="en-US" b="true" sz="4743">
-                <a:solidFill>
-                  <a:srgbClr val="545454"/>
-                </a:solidFill>
-                <a:latin typeface="Garet Bold"/>
-                <a:ea typeface="Garet Bold"/>
-                <a:cs typeface="Garet Bold"/>
-                <a:sym typeface="Garet Bold"/>
-              </a:rPr>
-              <a:t>06</a:t>
-            </a:r>
-          </a:p>
+          <a:p/>
         </p:txBody>
       </p:sp>
     </p:spTree>
@@ -6281,6 +5764,10 @@
             </a:stretch>
           </a:blipFill>
         </p:spPr>
+        <p:txBody>
+          <a:bodyPr/>
+          <a:p/>
+        </p:txBody>
       </p:sp>
       <p:sp>
         <p:nvSpPr>
@@ -6302,25 +5789,7 @@
             <a:spAutoFit/>
           </a:bodyPr>
           <a:lstStyle/>
-          <a:p>
-            <a:pPr algn="ctr">
-              <a:lnSpc>
-                <a:spcPts val="11448"/>
-              </a:lnSpc>
-            </a:pPr>
-            <a:r>
-              <a:rPr lang="en-US" b="true" sz="8177">
-                <a:solidFill>
-                  <a:srgbClr val="3F3D3E"/>
-                </a:solidFill>
-                <a:latin typeface="Alexandria Bold"/>
-                <a:ea typeface="Alexandria Bold"/>
-                <a:cs typeface="Alexandria Bold"/>
-                <a:sym typeface="Alexandria Bold"/>
-              </a:rPr>
-              <a:t>ANALYSIS</a:t>
-            </a:r>
-          </a:p>
+          <a:p/>
         </p:txBody>
       </p:sp>
       <p:sp>
@@ -6343,28 +5812,7 @@
             <a:spAutoFit/>
           </a:bodyPr>
           <a:lstStyle/>
-          <a:p>
-            <a:pPr algn="ctr">
-              <a:lnSpc>
-                <a:spcPts val="4576"/>
-              </a:lnSpc>
-              <a:spcBef>
-                <a:spcPct val="0"/>
-              </a:spcBef>
-            </a:pPr>
-            <a:r>
-              <a:rPr lang="en-US" sz="3268">
-                <a:solidFill>
-                  <a:srgbClr val="545454"/>
-                </a:solidFill>
-                <a:latin typeface="Garet"/>
-                <a:ea typeface="Garet"/>
-                <a:cs typeface="Garet"/>
-                <a:sym typeface="Garet"/>
-              </a:rPr>
-              <a:t>Lorem ipsum dolor sit amet, consectetur adipiscing elit. Duis vel dolor ante. Nullam feugiat egestas elit et vehicula. Proin venenatis, orci nec cursus tristique, nulla risus mattis eros, id accumsan massa elit eu augue. Mauris massa ipsum, pharetra id nibh eget, sodales facilisis enim.</a:t>
-            </a:r>
-          </a:p>
+          <a:p/>
         </p:txBody>
       </p:sp>
       <p:sp>
@@ -6418,6 +5866,10 @@
             </a:stretch>
           </a:blipFill>
         </p:spPr>
+        <p:txBody>
+          <a:bodyPr/>
+          <a:p/>
+        </p:txBody>
       </p:sp>
       <p:sp>
         <p:nvSpPr>
@@ -6442,6 +5894,10 @@
             <a:tailEnd type="none" len="sm" w="sm"/>
           </a:ln>
         </p:spPr>
+        <p:txBody>
+          <a:bodyPr/>
+          <a:p/>
+        </p:txBody>
       </p:sp>
       <p:sp>
         <p:nvSpPr>
@@ -6463,28 +5919,7 @@
             <a:spAutoFit/>
           </a:bodyPr>
           <a:lstStyle/>
-          <a:p>
-            <a:pPr algn="ctr">
-              <a:lnSpc>
-                <a:spcPts val="6641"/>
-              </a:lnSpc>
-              <a:spcBef>
-                <a:spcPct val="0"/>
-              </a:spcBef>
-            </a:pPr>
-            <a:r>
-              <a:rPr lang="en-US" b="true" sz="4743">
-                <a:solidFill>
-                  <a:srgbClr val="545454"/>
-                </a:solidFill>
-                <a:latin typeface="Garet Bold"/>
-                <a:ea typeface="Garet Bold"/>
-                <a:cs typeface="Garet Bold"/>
-                <a:sym typeface="Garet Bold"/>
-              </a:rPr>
-              <a:t>07</a:t>
-            </a:r>
-          </a:p>
+          <a:p/>
         </p:txBody>
       </p:sp>
     </p:spTree>
@@ -6570,6 +6005,10 @@
             </a:stretch>
           </a:blipFill>
         </p:spPr>
+        <p:txBody>
+          <a:bodyPr/>
+          <a:p/>
+        </p:txBody>
       </p:sp>
       <p:sp>
         <p:nvSpPr>
@@ -6591,25 +6030,7 @@
             <a:spAutoFit/>
           </a:bodyPr>
           <a:lstStyle/>
-          <a:p>
-            <a:pPr algn="ctr">
-              <a:lnSpc>
-                <a:spcPts val="11448"/>
-              </a:lnSpc>
-            </a:pPr>
-            <a:r>
-              <a:rPr lang="en-US" b="true" sz="8177">
-                <a:solidFill>
-                  <a:srgbClr val="3F3D3E"/>
-                </a:solidFill>
-                <a:latin typeface="Alexandria Bold"/>
-                <a:ea typeface="Alexandria Bold"/>
-                <a:cs typeface="Alexandria Bold"/>
-                <a:sym typeface="Alexandria Bold"/>
-              </a:rPr>
-              <a:t>RESULT</a:t>
-            </a:r>
-          </a:p>
+          <a:p/>
         </p:txBody>
       </p:sp>
       <p:sp>
@@ -6632,27 +6053,7 @@
             <a:spAutoFit/>
           </a:bodyPr>
           <a:lstStyle/>
-          <a:p>
-            <a:pPr algn="l" marL="705747" indent="-352873" lvl="1">
-              <a:lnSpc>
-                <a:spcPts val="4576"/>
-              </a:lnSpc>
-              <a:buFont typeface="Arial"/>
-              <a:buChar char="•"/>
-            </a:pPr>
-            <a:r>
-              <a:rPr lang="en-US" sz="3268">
-                <a:solidFill>
-                  <a:srgbClr val="545454"/>
-                </a:solidFill>
-                <a:latin typeface="Garet"/>
-                <a:ea typeface="Garet"/>
-                <a:cs typeface="Garet"/>
-                <a:sym typeface="Garet"/>
-              </a:rPr>
-              <a:t>Lorem ipsum dolor sit amet, consectetur adipiscing elit. Duis vel dolor ante. Nullam feugiat egestas elit et vehicula.</a:t>
-            </a:r>
-          </a:p>
+          <a:p/>
         </p:txBody>
       </p:sp>
       <p:sp>
@@ -6675,27 +6076,7 @@
             <a:spAutoFit/>
           </a:bodyPr>
           <a:lstStyle/>
-          <a:p>
-            <a:pPr algn="l" marL="705747" indent="-352873" lvl="1">
-              <a:lnSpc>
-                <a:spcPts val="4576"/>
-              </a:lnSpc>
-              <a:buFont typeface="Arial"/>
-              <a:buChar char="•"/>
-            </a:pPr>
-            <a:r>
-              <a:rPr lang="en-US" sz="3268">
-                <a:solidFill>
-                  <a:srgbClr val="545454"/>
-                </a:solidFill>
-                <a:latin typeface="Garet"/>
-                <a:ea typeface="Garet"/>
-                <a:cs typeface="Garet"/>
-                <a:sym typeface="Garet"/>
-              </a:rPr>
-              <a:t>Lorem ipsum dolor sit amet, consectetur adipiscing elit. Duis vel dolor ante. Nullam feugiat egestas elit et vehicula.</a:t>
-            </a:r>
-          </a:p>
+          <a:p/>
         </p:txBody>
       </p:sp>
       <p:sp>
@@ -6749,6 +6130,10 @@
             </a:stretch>
           </a:blipFill>
         </p:spPr>
+        <p:txBody>
+          <a:bodyPr/>
+          <a:p/>
+        </p:txBody>
       </p:sp>
       <p:sp>
         <p:nvSpPr>
@@ -6773,6 +6158,10 @@
             <a:tailEnd type="none" len="sm" w="sm"/>
           </a:ln>
         </p:spPr>
+        <p:txBody>
+          <a:bodyPr/>
+          <a:p/>
+        </p:txBody>
       </p:sp>
       <p:sp>
         <p:nvSpPr>
@@ -6794,28 +6183,7 @@
             <a:spAutoFit/>
           </a:bodyPr>
           <a:lstStyle/>
-          <a:p>
-            <a:pPr algn="ctr">
-              <a:lnSpc>
-                <a:spcPts val="6641"/>
-              </a:lnSpc>
-              <a:spcBef>
-                <a:spcPct val="0"/>
-              </a:spcBef>
-            </a:pPr>
-            <a:r>
-              <a:rPr lang="en-US" b="true" sz="4743">
-                <a:solidFill>
-                  <a:srgbClr val="545454"/>
-                </a:solidFill>
-                <a:latin typeface="Garet Bold"/>
-                <a:ea typeface="Garet Bold"/>
-                <a:cs typeface="Garet Bold"/>
-                <a:sym typeface="Garet Bold"/>
-              </a:rPr>
-              <a:t>08</a:t>
-            </a:r>
-          </a:p>
+          <a:p/>
         </p:txBody>
       </p:sp>
     </p:spTree>
